--- a/1_semester/distributed_systems_seminar/Research and initial Literature Review.pptx
+++ b/1_semester/distributed_systems_seminar/Research and initial Literature Review.pptx
@@ -7340,7 +7340,7 @@
               </a:spcAft>
             </a:pPr>
             <a:r>
-              <a:rPr sz="2000" b="0" i="0">
+              <a:rPr sz="2000" b="0" i="0" dirty="0">
                 <a:solidFill>
                   <a:srgbClr val="333333"/>
                 </a:solidFill>
@@ -11841,7 +11841,7 @@
         </p:nvGraphicFramePr>
         <p:xfrm>
           <a:off x="1280160" y="1554480"/>
-          <a:ext cx="9875519" cy="3328416"/>
+          <a:ext cx="9875519" cy="3639312"/>
         </p:xfrm>
         <a:graphic>
           <a:graphicData uri="http://schemas.openxmlformats.org/drawingml/2006/table">
@@ -12509,7 +12509,7 @@
         <p:spPr>
           <a:xfrm>
             <a:off x="1280160" y="1600200"/>
-            <a:ext cx="4800600" cy="4069080"/>
+            <a:ext cx="4800600" cy="4349186"/>
           </a:xfrm>
           <a:prstGeom prst="roundRect">
             <a:avLst>
@@ -12707,8 +12707,8 @@
         </p:nvSpPr>
         <p:spPr>
           <a:xfrm>
-            <a:off x="6355080" y="1600200"/>
-            <a:ext cx="4800600" cy="4069080"/>
+            <a:off x="6355080" y="1600199"/>
+            <a:ext cx="4800600" cy="4349187"/>
           </a:xfrm>
           <a:prstGeom prst="roundRect">
             <a:avLst>
@@ -12775,7 +12775,7 @@
               </a:spcAft>
             </a:pPr>
             <a:r>
-              <a:rPr sz="2000" b="0" i="0">
+              <a:rPr sz="2000" b="0" i="0" dirty="0">
                 <a:solidFill>
                   <a:srgbClr val="333333"/>
                 </a:solidFill>
@@ -12792,7 +12792,7 @@
               <a:buChar char="•"/>
             </a:pPr>
             <a:r>
-              <a:rPr sz="1700" b="0" i="0">
+              <a:rPr sz="1700" b="0" i="0" dirty="0">
                 <a:solidFill>
                   <a:srgbClr val="666666"/>
                 </a:solidFill>
@@ -12808,7 +12808,7 @@
               <a:buChar char="•"/>
             </a:pPr>
             <a:r>
-              <a:rPr sz="1700" b="0" i="0">
+              <a:rPr sz="1700" b="0" i="0" dirty="0">
                 <a:solidFill>
                   <a:srgbClr val="666666"/>
                 </a:solidFill>
@@ -12824,7 +12824,7 @@
               <a:buChar char="•"/>
             </a:pPr>
             <a:r>
-              <a:rPr sz="1700" b="0" i="0">
+              <a:rPr sz="1700" b="0" i="0" dirty="0">
                 <a:solidFill>
                   <a:srgbClr val="666666"/>
                 </a:solidFill>
@@ -12840,7 +12840,7 @@
               <a:buChar char="•"/>
             </a:pPr>
             <a:r>
-              <a:rPr sz="1700" b="0" i="0">
+              <a:rPr sz="1700" b="0" i="0" dirty="0">
                 <a:solidFill>
                   <a:srgbClr val="666666"/>
                 </a:solidFill>
@@ -12856,7 +12856,7 @@
               <a:buChar char="•"/>
             </a:pPr>
             <a:r>
-              <a:rPr sz="1700" b="0" i="0">
+              <a:rPr sz="1700" b="0" i="0" dirty="0">
                 <a:solidFill>
                   <a:srgbClr val="666666"/>
                 </a:solidFill>
@@ -12872,7 +12872,7 @@
               <a:buChar char="•"/>
             </a:pPr>
             <a:r>
-              <a:rPr sz="1700" b="0" i="0">
+              <a:rPr sz="1700" b="0" i="0" dirty="0">
                 <a:solidFill>
                   <a:srgbClr val="666666"/>
                 </a:solidFill>
@@ -12888,7 +12888,7 @@
               <a:buChar char="•"/>
             </a:pPr>
             <a:r>
-              <a:rPr sz="1700" b="0" i="0">
+              <a:rPr sz="1700" b="0" i="0" dirty="0">
                 <a:solidFill>
                   <a:srgbClr val="666666"/>
                 </a:solidFill>

--- a/1_semester/distributed_systems_seminar/Research and initial Literature Review.pptx
+++ b/1_semester/distributed_systems_seminar/Research and initial Literature Review.pptx
@@ -6017,7 +6017,7 @@
               </a:spcAft>
             </a:pPr>
             <a:r>
-              <a:rPr sz="2200" b="0" i="0">
+              <a:rPr sz="2200" b="0" i="0" dirty="0">
                 <a:solidFill>
                   <a:srgbClr val="666666"/>
                 </a:solidFill>
@@ -6032,21 +6032,64 @@
               </a:spcAft>
             </a:pPr>
             <a:r>
-              <a:rPr sz="1800" b="0" i="0">
+              <a:rPr sz="1800" b="0" i="0" dirty="0">
                 <a:solidFill>
                   <a:srgbClr val="333333"/>
                 </a:solidFill>
                 <a:latin typeface="Rubik Medium"/>
               </a:rPr>
-              <a:t>Ruslan Neshchadimov</a:t>
-            </a:r>
-            <a:r>
-              <a:rPr sz="1800" b="0" i="0">
+              <a:t>Ruslan </a:t>
+            </a:r>
+            <a:r>
+              <a:rPr sz="1800" b="0" i="0" dirty="0" err="1">
+                <a:solidFill>
+                  <a:srgbClr val="333333"/>
+                </a:solidFill>
+                <a:latin typeface="Rubik Medium"/>
+              </a:rPr>
+              <a:t>Nech</a:t>
+            </a:r>
+            <a:r>
+              <a:rPr lang="en-US" sz="1800" b="0" i="0" dirty="0" err="1">
+                <a:solidFill>
+                  <a:srgbClr val="333333"/>
+                </a:solidFill>
+                <a:latin typeface="Rubik Medium"/>
+              </a:rPr>
+              <a:t>sh</a:t>
+            </a:r>
+            <a:r>
+              <a:rPr sz="1800" b="0" i="0" dirty="0" err="1">
+                <a:solidFill>
+                  <a:srgbClr val="333333"/>
+                </a:solidFill>
+                <a:latin typeface="Rubik Medium"/>
+              </a:rPr>
+              <a:t>adimov</a:t>
+            </a:r>
+            <a:r>
+              <a:rPr sz="1800" b="0" i="0" dirty="0">
                 <a:solidFill>
                   <a:srgbClr val="666666"/>
                 </a:solidFill>
               </a:rPr>
-              <a:t>  ·  Supervisor: Artjom Lind  ·  7 October 2026</a:t>
+              <a:t>  ·  Supervisor: </a:t>
+            </a:r>
+            <a:r>
+              <a:rPr sz="1800" b="0" i="0" dirty="0" err="1">
+                <a:solidFill>
+                  <a:srgbClr val="666666"/>
+                </a:solidFill>
+              </a:rPr>
+              <a:t>Artjom</a:t>
+            </a:r>
+            <a:r>
+              <a:rPr sz="1800" b="0" i="0" dirty="0">
+                <a:solidFill>
+                  <a:srgbClr val="666666"/>
+                </a:solidFill>
+              </a:rPr>
+              <a:t> Lind  ·  October 2026</a:t>
             </a:r>
           </a:p>
         </p:txBody>

--- a/1_semester/distributed_systems_seminar/Research and initial Literature Review.pptx
+++ b/1_semester/distributed_systems_seminar/Research and initial Literature Review.pptx
@@ -241,7 +241,7 @@
           <a:p>
             <a:fld id="{9E2D58C1-116B-4911-BACB-E776802E69A8}" type="datetimeFigureOut">
               <a:rPr lang="ru-RU" smtClean="0"/>
-              <a:t>06.10.2026</a:t>
+              <a:t>07.10.2026</a:t>
             </a:fld>
             <a:endParaRPr lang="ru-RU"/>
           </a:p>
@@ -418,7 +418,7 @@
           <a:p>
             <a:fld id="{E8590DB8-F1C2-4AEC-B6B6-B0B81329753C}" type="datetimeFigureOut">
               <a:rPr lang="ru-RU" smtClean="0"/>
-              <a:t>06.10.2026</a:t>
+              <a:t>07.10.2026</a:t>
             </a:fld>
             <a:endParaRPr lang="ru-RU"/>
           </a:p>
@@ -1753,7 +1753,7 @@
           <a:p>
             <a:fld id="{3D812BB6-9262-465B-B360-DD4857339B9F}" type="datetimeFigureOut">
               <a:rPr lang="ru-RU" smtClean="0"/>
-              <a:t>06.10.2026</a:t>
+              <a:t>07.10.2026</a:t>
             </a:fld>
             <a:endParaRPr lang="ru-RU"/>
           </a:p>
@@ -1991,7 +1991,7 @@
           <a:p>
             <a:fld id="{3D812BB6-9262-465B-B360-DD4857339B9F}" type="datetimeFigureOut">
               <a:rPr lang="ru-RU" smtClean="0"/>
-              <a:t>06.10.2026</a:t>
+              <a:t>07.10.2026</a:t>
             </a:fld>
             <a:endParaRPr lang="ru-RU"/>
           </a:p>
@@ -2289,7 +2289,7 @@
           <a:p>
             <a:fld id="{3D812BB6-9262-465B-B360-DD4857339B9F}" type="datetimeFigureOut">
               <a:rPr lang="ru-RU" smtClean="0"/>
-              <a:t>06.10.2026</a:t>
+              <a:t>07.10.2026</a:t>
             </a:fld>
             <a:endParaRPr lang="ru-RU"/>
           </a:p>
@@ -2672,7 +2672,7 @@
           <a:p>
             <a:fld id="{3D812BB6-9262-465B-B360-DD4857339B9F}" type="datetimeFigureOut">
               <a:rPr lang="ru-RU" smtClean="0"/>
-              <a:t>06.10.2026</a:t>
+              <a:t>07.10.2026</a:t>
             </a:fld>
             <a:endParaRPr lang="ru-RU"/>
           </a:p>
@@ -3037,7 +3037,7 @@
           <a:p>
             <a:fld id="{3D812BB6-9262-465B-B360-DD4857339B9F}" type="datetimeFigureOut">
               <a:rPr lang="ru-RU" smtClean="0"/>
-              <a:t>06.10.2026</a:t>
+              <a:t>07.10.2026</a:t>
             </a:fld>
             <a:endParaRPr lang="ru-RU"/>
           </a:p>
@@ -3394,7 +3394,7 @@
           <a:p>
             <a:fld id="{3D812BB6-9262-465B-B360-DD4857339B9F}" type="datetimeFigureOut">
               <a:rPr lang="ru-RU" smtClean="0"/>
-              <a:t>06.10.2026</a:t>
+              <a:t>07.10.2026</a:t>
             </a:fld>
             <a:endParaRPr lang="ru-RU"/>
           </a:p>
@@ -3887,7 +3887,7 @@
           <a:p>
             <a:fld id="{3D812BB6-9262-465B-B360-DD4857339B9F}" type="datetimeFigureOut">
               <a:rPr lang="ru-RU" smtClean="0"/>
-              <a:t>06.10.2026</a:t>
+              <a:t>07.10.2026</a:t>
             </a:fld>
             <a:endParaRPr lang="ru-RU"/>
           </a:p>
@@ -4126,7 +4126,7 @@
           <a:p>
             <a:fld id="{3D812BB6-9262-465B-B360-DD4857339B9F}" type="datetimeFigureOut">
               <a:rPr lang="ru-RU" smtClean="0"/>
-              <a:t>06.10.2026</a:t>
+              <a:t>07.10.2026</a:t>
             </a:fld>
             <a:endParaRPr lang="ru-RU"/>
           </a:p>
@@ -4420,7 +4420,7 @@
           <a:p>
             <a:fld id="{3D812BB6-9262-465B-B360-DD4857339B9F}" type="datetimeFigureOut">
               <a:rPr lang="ru-RU" smtClean="0"/>
-              <a:t>06.10.2026</a:t>
+              <a:t>07.10.2026</a:t>
             </a:fld>
             <a:endParaRPr lang="ru-RU"/>
           </a:p>
@@ -4903,7 +4903,7 @@
           <a:p>
             <a:fld id="{3D812BB6-9262-465B-B360-DD4857339B9F}" type="datetimeFigureOut">
               <a:rPr lang="ru-RU" smtClean="0"/>
-              <a:t>06.10.2026</a:t>
+              <a:t>07.10.2026</a:t>
             </a:fld>
             <a:endParaRPr lang="ru-RU"/>
           </a:p>
@@ -5281,7 +5281,7 @@
           <a:p>
             <a:fld id="{3D812BB6-9262-465B-B360-DD4857339B9F}" type="datetimeFigureOut">
               <a:rPr lang="ru-RU" smtClean="0"/>
-              <a:t>06.10.2026</a:t>
+              <a:t>07.10.2026</a:t>
             </a:fld>
             <a:endParaRPr lang="ru-RU"/>
           </a:p>
@@ -6047,25 +6047,7 @@
                 </a:solidFill>
                 <a:latin typeface="Rubik Medium"/>
               </a:rPr>
-              <a:t>Nech</a:t>
-            </a:r>
-            <a:r>
-              <a:rPr lang="en-US" sz="1800" b="0" i="0" dirty="0" err="1">
-                <a:solidFill>
-                  <a:srgbClr val="333333"/>
-                </a:solidFill>
-                <a:latin typeface="Rubik Medium"/>
-              </a:rPr>
-              <a:t>sh</a:t>
-            </a:r>
-            <a:r>
-              <a:rPr sz="1800" b="0" i="0" dirty="0" err="1">
-                <a:solidFill>
-                  <a:srgbClr val="333333"/>
-                </a:solidFill>
-                <a:latin typeface="Rubik Medium"/>
-              </a:rPr>
-              <a:t>adimov</a:t>
+              <a:t>Neshchadimov</a:t>
             </a:r>
             <a:r>
               <a:rPr sz="1800" b="0" i="0" dirty="0">
@@ -6089,7 +6071,31 @@
                   <a:srgbClr val="666666"/>
                 </a:solidFill>
               </a:rPr>
-              <a:t> Lind  ·  October 2026</a:t>
+              <a:t> Lind  ·</a:t>
+            </a:r>
+            <a:r>
+              <a:rPr lang="ru-RU" sz="1800" b="0" i="0">
+                <a:solidFill>
+                  <a:srgbClr val="666666"/>
+                </a:solidFill>
+              </a:rPr>
+              <a:t> </a:t>
+            </a:r>
+            <a:r>
+              <a:rPr sz="1800" b="0" i="0">
+                <a:solidFill>
+                  <a:srgbClr val="666666"/>
+                </a:solidFill>
+              </a:rPr>
+              <a:t> </a:t>
+            </a:r>
+            <a:r>
+              <a:rPr sz="1800" b="0" i="0" dirty="0">
+                <a:solidFill>
+                  <a:srgbClr val="666666"/>
+                </a:solidFill>
+              </a:rPr>
+              <a:t>October 2026</a:t>
             </a:r>
           </a:p>
         </p:txBody>
@@ -6944,8 +6950,8 @@
         </p:nvSpPr>
         <p:spPr>
           <a:xfrm>
-            <a:off x="1280160" y="4617720"/>
-            <a:ext cx="9875520" cy="1188720"/>
+            <a:off x="1280160" y="4526280"/>
+            <a:ext cx="9875520" cy="1737360"/>
           </a:xfrm>
           <a:prstGeom prst="rect">
             <a:avLst/>
@@ -6957,6 +6963,30 @@
             <a:spAutoFit/>
           </a:bodyPr>
           <a:lstStyle/>
+          <a:p>
+            <a:pPr algn="l">
+              <a:spcAft>
+                <a:spcPts val="800"/>
+              </a:spcAft>
+            </a:pPr>
+            <a:r>
+              <a:rPr sz="1600" b="0" i="0">
+                <a:solidFill>
+                  <a:srgbClr val="1B365D"/>
+                </a:solidFill>
+                <a:latin typeface="Rubik Medium"/>
+              </a:rPr>
+              <a:t>Same grid on one host (same CPU): </a:t>
+            </a:r>
+            <a:r>
+              <a:rPr sz="1600" b="0" i="0">
+                <a:solidFill>
+                  <a:srgbClr val="333333"/>
+                </a:solidFill>
+              </a:rPr>
+              <a:t>29.8 ms at 10 KB, 74.7 ms at 1 MB; per-mechanism differences agree within 1–3 ms.</a:t>
+            </a:r>
+          </a:p>
           <a:p>
             <a:pPr algn="l">
               <a:spcAft>
@@ -7383,7 +7413,7 @@
               </a:spcAft>
             </a:pPr>
             <a:r>
-              <a:rPr sz="2000" b="0" i="0" dirty="0">
+              <a:rPr sz="2000" b="0" i="0">
                 <a:solidFill>
                   <a:srgbClr val="333333"/>
                 </a:solidFill>
@@ -8040,6 +8070,22 @@
               <a:t>TLS setup separated from per-message work</a:t>
             </a:r>
           </a:p>
+          <a:p>
+            <a:pPr marL="219456" indent="-219456" algn="l">
+              <a:spcAft>
+                <a:spcPts val="500"/>
+              </a:spcAft>
+              <a:buChar char="•"/>
+            </a:pPr>
+            <a:r>
+              <a:rPr sz="1600" b="0" i="0">
+                <a:solidFill>
+                  <a:srgbClr val="666666"/>
+                </a:solidFill>
+              </a:rPr>
+              <a:t>One host vs three machines (RQ3)</a:t>
+            </a:r>
+          </a:p>
         </p:txBody>
       </p:sp>
       <p:sp>
@@ -8140,22 +8186,6 @@
                   <a:srgbClr val="666666"/>
                 </a:solidFill>
               </a:rPr>
-              <a:t>Same grid on one host (l2), performance mode</a:t>
-            </a:r>
-          </a:p>
-          <a:p>
-            <a:pPr marL="219456" indent="-219456" algn="l">
-              <a:spcAft>
-                <a:spcPts val="500"/>
-              </a:spcAft>
-              <a:buChar char="•"/>
-            </a:pPr>
-            <a:r>
-              <a:rPr sz="1600" b="0" i="0">
-                <a:solidFill>
-                  <a:srgbClr val="666666"/>
-                </a:solidFill>
-              </a:rPr>
               <a:t>Same grid on the development laptop</a:t>
             </a:r>
           </a:p>
@@ -8260,22 +8290,6 @@
                 <a:latin typeface="Rubik Medium"/>
               </a:rPr>
               <a:t>Next</a:t>
-            </a:r>
-          </a:p>
-          <a:p>
-            <a:pPr marL="219456" indent="-219456" algn="l">
-              <a:spcAft>
-                <a:spcPts val="500"/>
-              </a:spcAft>
-              <a:buChar char="•"/>
-            </a:pPr>
-            <a:r>
-              <a:rPr sz="1600" b="0" i="0">
-                <a:solidFill>
-                  <a:srgbClr val="666666"/>
-                </a:solidFill>
-              </a:rPr>
-              <a:t>One host vs three machines on equal hardware (RQ3)</a:t>
             </a:r>
           </a:p>
           <a:p>
@@ -11884,7 +11898,7 @@
         </p:nvGraphicFramePr>
         <p:xfrm>
           <a:off x="1280160" y="1554480"/>
-          <a:ext cx="9875519" cy="3639312"/>
+          <a:ext cx="9875519" cy="3328416"/>
         </p:xfrm>
         <a:graphic>
           <a:graphicData uri="http://schemas.openxmlformats.org/drawingml/2006/table">
@@ -12552,7 +12566,7 @@
         <p:spPr>
           <a:xfrm>
             <a:off x="1280160" y="1600200"/>
-            <a:ext cx="4800600" cy="4349186"/>
+            <a:ext cx="4800600" cy="4069080"/>
           </a:xfrm>
           <a:prstGeom prst="roundRect">
             <a:avLst>
@@ -12750,8 +12764,8 @@
         </p:nvSpPr>
         <p:spPr>
           <a:xfrm>
-            <a:off x="6355080" y="1600199"/>
-            <a:ext cx="4800600" cy="4349187"/>
+            <a:off x="6355080" y="1600200"/>
+            <a:ext cx="4800600" cy="4069080"/>
           </a:xfrm>
           <a:prstGeom prst="roundRect">
             <a:avLst>
@@ -12818,7 +12832,7 @@
               </a:spcAft>
             </a:pPr>
             <a:r>
-              <a:rPr sz="2000" b="0" i="0" dirty="0">
+              <a:rPr sz="2000" b="0" i="0">
                 <a:solidFill>
                   <a:srgbClr val="333333"/>
                 </a:solidFill>
@@ -12835,7 +12849,7 @@
               <a:buChar char="•"/>
             </a:pPr>
             <a:r>
-              <a:rPr sz="1700" b="0" i="0" dirty="0">
+              <a:rPr sz="1700" b="0" i="0">
                 <a:solidFill>
                   <a:srgbClr val="666666"/>
                 </a:solidFill>
@@ -12851,7 +12865,7 @@
               <a:buChar char="•"/>
             </a:pPr>
             <a:r>
-              <a:rPr sz="1700" b="0" i="0" dirty="0">
+              <a:rPr sz="1700" b="0" i="0">
                 <a:solidFill>
                   <a:srgbClr val="666666"/>
                 </a:solidFill>
@@ -12867,7 +12881,7 @@
               <a:buChar char="•"/>
             </a:pPr>
             <a:r>
-              <a:rPr sz="1700" b="0" i="0" dirty="0">
+              <a:rPr sz="1700" b="0" i="0">
                 <a:solidFill>
                   <a:srgbClr val="666666"/>
                 </a:solidFill>
@@ -12883,7 +12897,7 @@
               <a:buChar char="•"/>
             </a:pPr>
             <a:r>
-              <a:rPr sz="1700" b="0" i="0" dirty="0">
+              <a:rPr sz="1700" b="0" i="0">
                 <a:solidFill>
                   <a:srgbClr val="666666"/>
                 </a:solidFill>
@@ -12899,7 +12913,7 @@
               <a:buChar char="•"/>
             </a:pPr>
             <a:r>
-              <a:rPr sz="1700" b="0" i="0" dirty="0">
+              <a:rPr sz="1700" b="0" i="0">
                 <a:solidFill>
                   <a:srgbClr val="666666"/>
                 </a:solidFill>
@@ -12915,7 +12929,7 @@
               <a:buChar char="•"/>
             </a:pPr>
             <a:r>
-              <a:rPr sz="1700" b="0" i="0" dirty="0">
+              <a:rPr sz="1700" b="0" i="0">
                 <a:solidFill>
                   <a:srgbClr val="666666"/>
                 </a:solidFill>
@@ -12931,7 +12945,7 @@
               <a:buChar char="•"/>
             </a:pPr>
             <a:r>
-              <a:rPr sz="1700" b="0" i="0" dirty="0">
+              <a:rPr sz="1700" b="0" i="0">
                 <a:solidFill>
                   <a:srgbClr val="666666"/>
                 </a:solidFill>

--- a/1_semester/distributed_systems_seminar/Research and initial Literature Review.pptx
+++ b/1_semester/distributed_systems_seminar/Research and initial Literature Review.pptx
@@ -6047,7 +6047,25 @@
                 </a:solidFill>
                 <a:latin typeface="Rubik Medium"/>
               </a:rPr>
-              <a:t>Neshchadimov</a:t>
+              <a:t>Nech</a:t>
+            </a:r>
+            <a:r>
+              <a:rPr lang="en-US" sz="1800" dirty="0" err="1">
+                <a:solidFill>
+                  <a:srgbClr val="333333"/>
+                </a:solidFill>
+                <a:latin typeface="Rubik Medium"/>
+              </a:rPr>
+              <a:t>sh</a:t>
+            </a:r>
+            <a:r>
+              <a:rPr sz="1800" b="0" i="0" dirty="0" err="1">
+                <a:solidFill>
+                  <a:srgbClr val="333333"/>
+                </a:solidFill>
+                <a:latin typeface="Rubik Medium"/>
+              </a:rPr>
+              <a:t>adimov</a:t>
             </a:r>
             <a:r>
               <a:rPr sz="1800" b="0" i="0" dirty="0">
@@ -6074,7 +6092,7 @@
               <a:t> Lind  ·</a:t>
             </a:r>
             <a:r>
-              <a:rPr lang="ru-RU" sz="1800" b="0" i="0">
+              <a:rPr lang="ru-RU" sz="1800" b="0" i="0" dirty="0">
                 <a:solidFill>
                   <a:srgbClr val="666666"/>
                 </a:solidFill>
@@ -6082,20 +6100,12 @@
               <a:t> </a:t>
             </a:r>
             <a:r>
-              <a:rPr sz="1800" b="0" i="0">
+              <a:rPr sz="1800" b="0" i="0" dirty="0">
                 <a:solidFill>
                   <a:srgbClr val="666666"/>
                 </a:solidFill>
               </a:rPr>
-              <a:t> </a:t>
-            </a:r>
-            <a:r>
-              <a:rPr sz="1800" b="0" i="0" dirty="0">
-                <a:solidFill>
-                  <a:srgbClr val="666666"/>
-                </a:solidFill>
-              </a:rPr>
-              <a:t>October 2026</a:t>
+              <a:t> October 2026</a:t>
             </a:r>
           </a:p>
         </p:txBody>
@@ -11898,7 +11908,7 @@
         </p:nvGraphicFramePr>
         <p:xfrm>
           <a:off x="1280160" y="1554480"/>
-          <a:ext cx="9875519" cy="3328416"/>
+          <a:ext cx="9875519" cy="3639312"/>
         </p:xfrm>
         <a:graphic>
           <a:graphicData uri="http://schemas.openxmlformats.org/drawingml/2006/table">
@@ -12565,8 +12575,8 @@
         </p:nvSpPr>
         <p:spPr>
           <a:xfrm>
-            <a:off x="1280160" y="1600200"/>
-            <a:ext cx="4800600" cy="4069080"/>
+            <a:off x="1280160" y="1608150"/>
+            <a:ext cx="4800600" cy="4363277"/>
           </a:xfrm>
           <a:prstGeom prst="roundRect">
             <a:avLst>
@@ -12765,7 +12775,7 @@
         <p:spPr>
           <a:xfrm>
             <a:off x="6355080" y="1600200"/>
-            <a:ext cx="4800600" cy="4069080"/>
+            <a:ext cx="4800600" cy="4363278"/>
           </a:xfrm>
           <a:prstGeom prst="roundRect">
             <a:avLst>
@@ -12832,7 +12842,7 @@
               </a:spcAft>
             </a:pPr>
             <a:r>
-              <a:rPr sz="2000" b="0" i="0">
+              <a:rPr sz="2000" b="0" i="0" dirty="0">
                 <a:solidFill>
                   <a:srgbClr val="333333"/>
                 </a:solidFill>
@@ -12849,7 +12859,7 @@
               <a:buChar char="•"/>
             </a:pPr>
             <a:r>
-              <a:rPr sz="1700" b="0" i="0">
+              <a:rPr sz="1700" b="0" i="0" dirty="0">
                 <a:solidFill>
                   <a:srgbClr val="666666"/>
                 </a:solidFill>
@@ -12865,7 +12875,7 @@
               <a:buChar char="•"/>
             </a:pPr>
             <a:r>
-              <a:rPr sz="1700" b="0" i="0">
+              <a:rPr sz="1700" b="0" i="0" dirty="0">
                 <a:solidFill>
                   <a:srgbClr val="666666"/>
                 </a:solidFill>
@@ -12881,7 +12891,7 @@
               <a:buChar char="•"/>
             </a:pPr>
             <a:r>
-              <a:rPr sz="1700" b="0" i="0">
+              <a:rPr sz="1700" b="0" i="0" dirty="0">
                 <a:solidFill>
                   <a:srgbClr val="666666"/>
                 </a:solidFill>
@@ -12897,7 +12907,7 @@
               <a:buChar char="•"/>
             </a:pPr>
             <a:r>
-              <a:rPr sz="1700" b="0" i="0">
+              <a:rPr sz="1700" b="0" i="0" dirty="0">
                 <a:solidFill>
                   <a:srgbClr val="666666"/>
                 </a:solidFill>
@@ -12913,7 +12923,7 @@
               <a:buChar char="•"/>
             </a:pPr>
             <a:r>
-              <a:rPr sz="1700" b="0" i="0">
+              <a:rPr sz="1700" b="0" i="0" dirty="0">
                 <a:solidFill>
                   <a:srgbClr val="666666"/>
                 </a:solidFill>
@@ -12929,7 +12939,7 @@
               <a:buChar char="•"/>
             </a:pPr>
             <a:r>
-              <a:rPr sz="1700" b="0" i="0">
+              <a:rPr sz="1700" b="0" i="0" dirty="0">
                 <a:solidFill>
                   <a:srgbClr val="666666"/>
                 </a:solidFill>
@@ -12945,7 +12955,7 @@
               <a:buChar char="•"/>
             </a:pPr>
             <a:r>
-              <a:rPr sz="1700" b="0" i="0">
+              <a:rPr sz="1700" b="0" i="0" dirty="0">
                 <a:solidFill>
                   <a:srgbClr val="666666"/>
                 </a:solidFill>
